--- a/data/employees/EMP032/AST-EMP032-01.pptx
+++ b/data/employees/EMP032/AST-EMP032-01.pptx
@@ -9,6 +9,7 @@
     <p:sldId id="257" r:id="rId8"/>
     <p:sldId id="258" r:id="rId9"/>
     <p:sldId id="259" r:id="rId10"/>
+    <p:sldId id="260" r:id="rId11"/>
   </p:sldIdLst>
   <p:sldSz cx="9144000" cy="6858000" type="screen4x3"/>
   <p:notesSz cx="6858000" cy="9144000"/>
@@ -3098,42 +3099,55 @@
             <a:spLocks noGrp="1"/>
           </p:cNvSpPr>
           <p:nvPr>
-            <p:ph type="ctrTitle"/>
-          </p:nvPr>
-        </p:nvSpPr>
-        <p:spPr/>
-        <p:txBody>
-          <a:bodyPr/>
-          <a:lstStyle/>
-          <a:p>
-            <a:r>
-              <a:t>Project update deck - EMP032</a:t>
-            </a:r>
-          </a:p>
-        </p:txBody>
-      </p:sp>
-      <p:sp>
-        <p:nvSpPr>
-          <p:cNvPr id="3" name="Subtitle 2"/>
-          <p:cNvSpPr>
-            <a:spLocks noGrp="1"/>
-          </p:cNvSpPr>
-          <p:nvPr>
-            <p:ph type="subTitle" idx="1"/>
-          </p:nvPr>
-        </p:nvSpPr>
-        <p:spPr/>
-        <p:txBody>
-          <a:bodyPr/>
-          <a:lstStyle/>
-          <a:p>
-            <a:r>
-              <a:t>Jordan Nguyen | Engineer | Engineering</a:t>
-            </a:r>
-          </a:p>
-          <a:p>
-            <a:r>
-              <a:t>Prepared: 2025-02-03</a:t>
+            <p:ph type="title"/>
+          </p:nvPr>
+        </p:nvSpPr>
+        <p:spPr/>
+        <p:txBody>
+          <a:bodyPr/>
+          <a:lstStyle/>
+          <a:p>
+            <a:r>
+              <a:t>Ast Emp032 01 - EMP032</a:t>
+            </a:r>
+          </a:p>
+        </p:txBody>
+      </p:sp>
+      <p:sp>
+        <p:nvSpPr>
+          <p:cNvPr id="3" name="Content Placeholder 2"/>
+          <p:cNvSpPr>
+            <a:spLocks noGrp="1"/>
+          </p:cNvSpPr>
+          <p:nvPr>
+            <p:ph idx="1"/>
+          </p:nvPr>
+        </p:nvSpPr>
+        <p:spPr/>
+        <p:txBody>
+          <a:bodyPr/>
+          <a:lstStyle/>
+          <a:p>
+            <a:r>
+              <a:t>Slide 1: Executive Summary</a:t>
+            </a:r>
+          </a:p>
+          <a:p>
+            <a:pPr lvl="1"/>
+            <a:r>
+              <a:t>Section 1: Fabric semantic model planning. EMP032 contributes to ast emp032 01 through recurring collaboration, clear ownership boundaries, and measurable outcomes. The team captures decisions, open issues, and handoffs so that knowledge remains discoverable for future programs.</a:t>
+            </a:r>
+          </a:p>
+          <a:p>
+            <a:pPr lvl="1"/>
+            <a:r>
+              <a:t>Section 2: Fabric semantic model planning. EMP032 contributes to ast emp032 01 through recurring collaboration, clear ownership boundaries, and measurable outcomes. The team captures decisions, open issues, and handoffs so that knowledge remains discoverable for future programs.</a:t>
+            </a:r>
+          </a:p>
+          <a:p>
+            <a:pPr lvl="1"/>
+            <a:r>
+              <a:t>Section 3: Knowledge transfer and onboarding. EMP032 contributes to ast emp032 01 through recurring collaboration, clear ownership boundaries, and measurable outcomes. The team captures decisions, open issues, and handoffs so that knowledge remains discoverable for future programs.</a:t>
             </a:r>
           </a:p>
         </p:txBody>
@@ -3172,7 +3186,7 @@
           <a:lstStyle/>
           <a:p>
             <a:r>
-              <a:t>Sprint Velocity Trends</a:t>
+              <a:t>Ast Emp032 01 - EMP032</a:t>
             </a:r>
           </a:p>
         </p:txBody>
@@ -3193,17 +3207,25 @@
           <a:lstStyle/>
           <a:p>
             <a:r>
-              <a:t>Overview of Sprint Velocity Trends for Engineering department.</a:t>
-            </a:r>
-          </a:p>
-          <a:p>
-            <a:r>
-              <a:t>Responsible: Jordan Nguyen (Engineer)</a:t>
-            </a:r>
-          </a:p>
-          <a:p>
-            <a:r>
-              <a:t>Location: Fremont | Skills: Kusto, MLOps, Fabric, TypeScript</a:t>
+              <a:t>Slide 2: Executive Summary</a:t>
+            </a:r>
+          </a:p>
+          <a:p>
+            <a:pPr lvl="1"/>
+            <a:r>
+              <a:t>Section 1: Data quality remediation. EMP032 contributes to ast emp032 01 through recurring collaboration, clear ownership boundaries, and measurable outcomes. The team captures decisions, open issues, and handoffs so that knowledge remains discoverable for future programs.</a:t>
+            </a:r>
+          </a:p>
+          <a:p>
+            <a:pPr lvl="1"/>
+            <a:r>
+              <a:t>Section 2: Department KPI performance. EMP032 contributes to ast emp032 01 through recurring collaboration, clear ownership boundaries, and measurable outcomes. The team captures decisions, open issues, and handoffs so that knowledge remains discoverable for future programs.</a:t>
+            </a:r>
+          </a:p>
+          <a:p>
+            <a:pPr lvl="1"/>
+            <a:r>
+              <a:t>Section 3: Customer escalation analysis. EMP032 contributes to ast emp032 01 through recurring collaboration, clear ownership boundaries, and measurable outcomes. The team captures decisions, open issues, and handoffs so that knowledge remains discoverable for future programs.</a:t>
             </a:r>
           </a:p>
         </p:txBody>
@@ -3242,7 +3264,7 @@
           <a:lstStyle/>
           <a:p>
             <a:r>
-              <a:t>Technical Debt Dashboard</a:t>
+              <a:t>Ast Emp032 01 - EMP032</a:t>
             </a:r>
           </a:p>
         </p:txBody>
@@ -3263,17 +3285,25 @@
           <a:lstStyle/>
           <a:p>
             <a:r>
-              <a:t>Overview of Technical Debt Dashboard for Engineering department.</a:t>
-            </a:r>
-          </a:p>
-          <a:p>
-            <a:r>
-              <a:t>Responsible: Jordan Nguyen (Engineer)</a:t>
-            </a:r>
-          </a:p>
-          <a:p>
-            <a:r>
-              <a:t>Location: Fremont | Skills: Kusto, MLOps, Fabric, TypeScript</a:t>
+              <a:t>Slide 3: Executive Summary</a:t>
+            </a:r>
+          </a:p>
+          <a:p>
+            <a:pPr lvl="1"/>
+            <a:r>
+              <a:t>Section 1: Data quality remediation. EMP032 contributes to ast emp032 01 through recurring collaboration, clear ownership boundaries, and measurable outcomes. The team captures decisions, open issues, and handoffs so that knowledge remains discoverable for future programs.</a:t>
+            </a:r>
+          </a:p>
+          <a:p>
+            <a:pPr lvl="1"/>
+            <a:r>
+              <a:t>Section 2: Department KPI performance. EMP032 contributes to ast emp032 01 through recurring collaboration, clear ownership boundaries, and measurable outcomes. The team captures decisions, open issues, and handoffs so that knowledge remains discoverable for future programs.</a:t>
+            </a:r>
+          </a:p>
+          <a:p>
+            <a:pPr lvl="1"/>
+            <a:r>
+              <a:t>Section 3: Customer escalation analysis. EMP032 contributes to ast emp032 01 through recurring collaboration, clear ownership boundaries, and measurable outcomes. The team captures decisions, open issues, and handoffs so that knowledge remains discoverable for future programs.</a:t>
             </a:r>
           </a:p>
         </p:txBody>
@@ -3312,7 +3342,7 @@
           <a:lstStyle/>
           <a:p>
             <a:r>
-              <a:t>Architecture Review Outcomes</a:t>
+              <a:t>Ast Emp032 01 - EMP032</a:t>
             </a:r>
           </a:p>
         </p:txBody>
@@ -3333,17 +3363,103 @@
           <a:lstStyle/>
           <a:p>
             <a:r>
-              <a:t>Overview of Architecture Review Outcomes for Engineering department.</a:t>
-            </a:r>
-          </a:p>
-          <a:p>
-            <a:r>
-              <a:t>Responsible: Jordan Nguyen (Engineer)</a:t>
-            </a:r>
-          </a:p>
-          <a:p>
-            <a:r>
-              <a:t>Location: Fremont | Skills: Kusto, MLOps, Fabric, TypeScript</a:t>
+              <a:t>Slide 4: Executive Summary</a:t>
+            </a:r>
+          </a:p>
+          <a:p>
+            <a:pPr lvl="1"/>
+            <a:r>
+              <a:t>Section 1: Customer escalation analysis. EMP032 contributes to ast emp032 01 through recurring collaboration, clear ownership boundaries, and measurable outcomes. The team captures decisions, open issues, and handoffs so that knowledge remains discoverable for future programs.</a:t>
+            </a:r>
+          </a:p>
+          <a:p>
+            <a:pPr lvl="1"/>
+            <a:r>
+              <a:t>Section 2: Department KPI performance. EMP032 contributes to ast emp032 01 through recurring collaboration, clear ownership boundaries, and measurable outcomes. The team captures decisions, open issues, and handoffs so that knowledge remains discoverable for future programs.</a:t>
+            </a:r>
+          </a:p>
+          <a:p>
+            <a:pPr lvl="1"/>
+            <a:r>
+              <a:t>Section 3: Department KPI performance. EMP032 contributes to ast emp032 01 through recurring collaboration, clear ownership boundaries, and measurable outcomes. The team captures decisions, open issues, and handoffs so that knowledge remains discoverable for future programs.</a:t>
+            </a:r>
+          </a:p>
+        </p:txBody>
+      </p:sp>
+    </p:spTree>
+  </p:cSld>
+  <p:clrMapOvr>
+    <a:masterClrMapping/>
+  </p:clrMapOvr>
+</p:sld>
+</file>
+
+<file path=ppt/slides/slide5.xml><?xml version="1.0" encoding="utf-8"?>
+<p:sld xmlns:a="http://schemas.openxmlformats.org/drawingml/2006/main" xmlns:p="http://schemas.openxmlformats.org/presentationml/2006/main" xmlns:r="http://schemas.openxmlformats.org/officeDocument/2006/relationships">
+  <p:cSld>
+    <p:spTree>
+      <p:nvGrpSpPr>
+        <p:cNvPr id="1" name=""/>
+        <p:cNvGrpSpPr/>
+        <p:nvPr/>
+      </p:nvGrpSpPr>
+      <p:grpSpPr/>
+      <p:sp>
+        <p:nvSpPr>
+          <p:cNvPr id="2" name="Title 1"/>
+          <p:cNvSpPr>
+            <a:spLocks noGrp="1"/>
+          </p:cNvSpPr>
+          <p:nvPr>
+            <p:ph type="title"/>
+          </p:nvPr>
+        </p:nvSpPr>
+        <p:spPr/>
+        <p:txBody>
+          <a:bodyPr/>
+          <a:lstStyle/>
+          <a:p>
+            <a:r>
+              <a:t>Ast Emp032 01 - EMP032</a:t>
+            </a:r>
+          </a:p>
+        </p:txBody>
+      </p:sp>
+      <p:sp>
+        <p:nvSpPr>
+          <p:cNvPr id="3" name="Content Placeholder 2"/>
+          <p:cNvSpPr>
+            <a:spLocks noGrp="1"/>
+          </p:cNvSpPr>
+          <p:nvPr>
+            <p:ph idx="1"/>
+          </p:nvPr>
+        </p:nvSpPr>
+        <p:spPr/>
+        <p:txBody>
+          <a:bodyPr/>
+          <a:lstStyle/>
+          <a:p>
+            <a:r>
+              <a:t>Slide 5: Executive Summary</a:t>
+            </a:r>
+          </a:p>
+          <a:p>
+            <a:pPr lvl="1"/>
+            <a:r>
+              <a:t>Section 1: Quarterly delivery milestones. EMP032 contributes to ast emp032 01 through recurring collaboration, clear ownership boundaries, and measurable outcomes. The team captures decisions, open issues, and handoffs so that knowledge remains discoverable for future programs.</a:t>
+            </a:r>
+          </a:p>
+          <a:p>
+            <a:pPr lvl="1"/>
+            <a:r>
+              <a:t>Section 2: Customer escalation analysis. EMP032 contributes to ast emp032 01 through recurring collaboration, clear ownership boundaries, and measurable outcomes. The team captures decisions, open issues, and handoffs so that knowledge remains discoverable for future programs.</a:t>
+            </a:r>
+          </a:p>
+          <a:p>
+            <a:pPr lvl="1"/>
+            <a:r>
+              <a:t>Section 3: Customer escalation analysis. EMP032 contributes to ast emp032 01 through recurring collaboration, clear ownership boundaries, and measurable outcomes. The team captures decisions, open issues, and handoffs so that knowledge remains discoverable for future programs.</a:t>
             </a:r>
           </a:p>
         </p:txBody>
